--- a/system-design-101/vi/lessons/sd-05-002/slides/sd-05-002.pptx
+++ b/system-design-101/vi/lessons/sd-05-002/slides/sd-05-002.pptx
@@ -15283,192 +15283,82 @@
           <a:ln/>
         </p:spPr>
         <p:txBody>
-          <a:bodyPr wrap="square" lIns="0" tIns="6667" rIns="0" bIns="-6667" rtlCol="0" anchor="t"/>
+          <a:bodyPr wrap="square" lIns="0" tIns="59150" rIns="0" bIns="-59150" rtlCol="0" anchor="t"/>
           <a:lstStyle/>
           <a:p>
             <a:pPr algn="l" indent="0" marL="0">
               <a:lnSpc>
-                <a:spcPts val="4200"/>
+                <a:spcPts val="7245"/>
               </a:lnSpc>
               <a:buNone/>
             </a:pPr>
             <a:r>
-              <a:rPr lang="en-US" sz="3000" dirty="0" spc="-3" kern="0">
+              <a:rPr lang="en-US" sz="6900" dirty="0" spc="4" kern="0">
                 <a:solidFill>
                   <a:srgbClr val="14161C"/>
                 </a:solidFill>
-                <a:latin typeface="Be Vietnam Pro" pitchFamily="34" charset="0"/>
-                <a:ea typeface="Be Vietnam Pro" pitchFamily="34" charset="-122"/>
-                <a:cs typeface="Be Vietnam Pro" pitchFamily="34" charset="-120"/>
+                <a:latin typeface="Bricolage Grotesque ExtraBold" pitchFamily="34" charset="0"/>
+                <a:ea typeface="Bricolage Grotesque ExtraBold" pitchFamily="34" charset="-122"/>
+                <a:cs typeface="Bricolage Grotesque ExtraBold" pitchFamily="34" charset="-120"/>
               </a:rPr>
               <a:t>IP</a:t>
             </a:r>
             <a:r>
-              <a:rPr lang="en-US" sz="3000" dirty="0" spc="1" kern="0">
+              <a:rPr lang="en-US" sz="6900" dirty="0" spc="-1" kern="0">
                 <a:solidFill>
                   <a:srgbClr val="14161C"/>
                 </a:solidFill>
-                <a:latin typeface="Be Vietnam Pro" pitchFamily="34" charset="0"/>
-                <a:ea typeface="Be Vietnam Pro" pitchFamily="34" charset="-122"/>
-                <a:cs typeface="Be Vietnam Pro" pitchFamily="34" charset="-120"/>
-              </a:rPr>
-              <a:t> của</a:t>
-            </a:r>
-            <a:r>
-              <a:rPr lang="en-US" sz="3000" dirty="0" spc="-17" kern="0">
+                <a:latin typeface="Bricolage Grotesque ExtraBold" pitchFamily="34" charset="0"/>
+                <a:ea typeface="Bricolage Grotesque ExtraBold" pitchFamily="34" charset="-122"/>
+                <a:cs typeface="Bricolage Grotesque ExtraBold" pitchFamily="34" charset="-120"/>
+              </a:rPr>
+              <a:t> còn</a:t>
+            </a:r>
+            <a:r>
+              <a:rPr lang="en-US" sz="6900" dirty="0" spc="-13" kern="0">
                 <a:solidFill>
                   <a:srgbClr val="14161C"/>
                 </a:solidFill>
-                <a:latin typeface="Be Vietnam Pro" pitchFamily="34" charset="0"/>
-                <a:ea typeface="Be Vietnam Pro" pitchFamily="34" charset="-122"/>
-                <a:cs typeface="Be Vietnam Pro" pitchFamily="34" charset="-120"/>
-              </a:rPr>
-              <a:t> tên</a:t>
-            </a:r>
-            <a:r>
-              <a:rPr lang="en-US" sz="3000" dirty="0" spc="2" kern="0">
+                <a:latin typeface="Bricolage Grotesque ExtraBold" pitchFamily="34" charset="0"/>
+                <a:ea typeface="Bricolage Grotesque ExtraBold" pitchFamily="34" charset="-122"/>
+                <a:cs typeface="Bricolage Grotesque ExtraBold" pitchFamily="34" charset="-120"/>
+              </a:rPr>
+              <a:t> trong</a:t>
+            </a:r>
+            <a:r>
+              <a:rPr lang="en-US" sz="6900" dirty="0" spc="0" kern="0">
                 <a:solidFill>
                   <a:srgbClr val="14161C"/>
                 </a:solidFill>
-                <a:latin typeface="Be Vietnam Pro" pitchFamily="34" charset="0"/>
-                <a:ea typeface="Be Vietnam Pro" pitchFamily="34" charset="-122"/>
-                <a:cs typeface="Be Vietnam Pro" pitchFamily="34" charset="-120"/>
-              </a:rPr>
-              <a:t> miền</a:t>
-            </a:r>
-            <a:r>
-              <a:rPr lang="en-US" sz="3000" dirty="0" spc="12" kern="0">
+                <a:latin typeface="Bricolage Grotesque ExtraBold" pitchFamily="34" charset="0"/>
+                <a:ea typeface="Bricolage Grotesque ExtraBold" pitchFamily="34" charset="-122"/>
+                <a:cs typeface="Bricolage Grotesque ExtraBold" pitchFamily="34" charset="-120"/>
+              </a:rPr>
+              <a:t> cache: bỏ qua</a:t>
+            </a:r>
+            <a:r>
+              <a:rPr lang="en-US" sz="6900" dirty="0" spc="-95" kern="0">
                 <a:solidFill>
                   <a:srgbClr val="14161C"/>
                 </a:solidFill>
-                <a:latin typeface="Be Vietnam Pro" pitchFamily="34" charset="0"/>
-                <a:ea typeface="Be Vietnam Pro" pitchFamily="34" charset="-122"/>
-                <a:cs typeface="Be Vietnam Pro" pitchFamily="34" charset="-120"/>
-              </a:rPr>
-              <a:t> vừa</a:t>
-            </a:r>
-            <a:r>
-              <a:rPr lang="en-US" sz="3000" dirty="0" spc="-30" kern="0">
+                <a:latin typeface="Bricolage Grotesque ExtraBold" pitchFamily="34" charset="0"/>
+                <a:ea typeface="Bricolage Grotesque ExtraBold" pitchFamily="34" charset="-122"/>
+                <a:cs typeface="Bricolage Grotesque ExtraBold" pitchFamily="34" charset="-120"/>
+              </a:rPr>
+              <a:t> bước</a:t>
+            </a:r>
+            <a:r>
+              <a:rPr lang="en-US" sz="6900" dirty="0" spc="-39" kern="0">
                 <a:solidFill>
                   <a:srgbClr val="14161C"/>
                 </a:solidFill>
-                <a:latin typeface="Be Vietnam Pro" pitchFamily="34" charset="0"/>
-                <a:ea typeface="Be Vietnam Pro" pitchFamily="34" charset="-122"/>
-                <a:cs typeface="Be Vietnam Pro" pitchFamily="34" charset="-120"/>
-              </a:rPr>
-              <a:t> tra</a:t>
-            </a:r>
-            <a:r>
-              <a:rPr lang="en-US" sz="3000" dirty="0" spc="1" kern="0">
-                <a:solidFill>
-                  <a:srgbClr val="14161C"/>
-                </a:solidFill>
-                <a:latin typeface="Be Vietnam Pro" pitchFamily="34" charset="0"/>
-                <a:ea typeface="Be Vietnam Pro" pitchFamily="34" charset="-122"/>
-                <a:cs typeface="Be Vietnam Pro" pitchFamily="34" charset="-120"/>
-              </a:rPr>
-              <a:t> ít</a:t>
-            </a:r>
-            <a:r>
-              <a:rPr lang="en-US" sz="3000" dirty="0" spc="0" kern="0">
-                <a:solidFill>
-                  <a:srgbClr val="14161C"/>
-                </a:solidFill>
-                <a:latin typeface="Be Vietnam Pro" pitchFamily="34" charset="0"/>
-                <a:ea typeface="Be Vietnam Pro" pitchFamily="34" charset="-122"/>
-                <a:cs typeface="Be Vietnam Pro" pitchFamily="34" charset="-120"/>
-              </a:rPr>
-              <a:t> phút</a:t>
-            </a:r>
-            <a:r>
-              <a:rPr lang="en-US" sz="3000" dirty="0" spc="8" kern="0">
-                <a:solidFill>
-                  <a:srgbClr val="14161C"/>
-                </a:solidFill>
-                <a:latin typeface="Be Vietnam Pro" pitchFamily="34" charset="0"/>
-                <a:ea typeface="Be Vietnam Pro" pitchFamily="34" charset="-122"/>
-                <a:cs typeface="Be Vietnam Pro" pitchFamily="34" charset="-120"/>
-              </a:rPr>
-              <a:t> trước,</a:t>
-            </a:r>
-            <a:r>
-              <a:rPr lang="en-US" sz="3000" dirty="0" spc="0" kern="0">
-                <a:solidFill>
-                  <a:srgbClr val="14161C"/>
-                </a:solidFill>
-                <a:latin typeface="Be Vietnam Pro" pitchFamily="34" charset="0"/>
-                <a:ea typeface="Be Vietnam Pro" pitchFamily="34" charset="-122"/>
-                <a:cs typeface="Be Vietnam Pro" pitchFamily="34" charset="-120"/>
-              </a:rPr>
-              <a:t> còn</a:t>
-            </a:r>
-            <a:r>
-              <a:rPr lang="en-US" sz="3000" dirty="0" spc="19" kern="0">
-                <a:solidFill>
-                  <a:srgbClr val="14161C"/>
-                </a:solidFill>
-                <a:latin typeface="Be Vietnam Pro" pitchFamily="34" charset="0"/>
-                <a:ea typeface="Be Vietnam Pro" pitchFamily="34" charset="-122"/>
-                <a:cs typeface="Be Vietnam Pro" pitchFamily="34" charset="-120"/>
-              </a:rPr>
-              <a:t> lưu.</a:t>
-            </a:r>
-            <a:r>
-              <a:rPr lang="en-US" sz="3000" dirty="0" spc="1" kern="0">
-                <a:solidFill>
-                  <a:srgbClr val="14161C"/>
-                </a:solidFill>
-                <a:latin typeface="Be Vietnam Pro" pitchFamily="34" charset="0"/>
-                <a:ea typeface="Be Vietnam Pro" pitchFamily="34" charset="-122"/>
-                <a:cs typeface="Be Vietnam Pro" pitchFamily="34" charset="-120"/>
-              </a:rPr>
-              <a:t> Bỏ</a:t>
-            </a:r>
-            <a:r>
-              <a:rPr lang="en-US" sz="3000" dirty="0" spc="2" kern="0">
-                <a:solidFill>
-                  <a:srgbClr val="14161C"/>
-                </a:solidFill>
-                <a:latin typeface="Be Vietnam Pro" pitchFamily="34" charset="0"/>
-                <a:ea typeface="Be Vietnam Pro" pitchFamily="34" charset="-122"/>
-                <a:cs typeface="Be Vietnam Pro" pitchFamily="34" charset="-120"/>
-              </a:rPr>
-              <a:t> qua</a:t>
-            </a:r>
-            <a:r>
-              <a:rPr lang="en-US" sz="3000" dirty="0" spc="11" kern="0">
-                <a:solidFill>
-                  <a:srgbClr val="14161C"/>
-                </a:solidFill>
-                <a:latin typeface="Be Vietnam Pro" pitchFamily="34" charset="0"/>
-                <a:ea typeface="Be Vietnam Pro" pitchFamily="34" charset="-122"/>
-                <a:cs typeface="Be Vietnam Pro" pitchFamily="34" charset="-120"/>
-              </a:rPr>
-              <a:t> được</a:t>
-            </a:r>
-            <a:r>
-              <a:rPr lang="en-US" sz="3000" dirty="0" spc="13" kern="0">
-                <a:solidFill>
-                  <a:srgbClr val="14161C"/>
-                </a:solidFill>
-                <a:latin typeface="Be Vietnam Pro" pitchFamily="34" charset="0"/>
-                <a:ea typeface="Be Vietnam Pro" pitchFamily="34" charset="-122"/>
-                <a:cs typeface="Be Vietnam Pro" pitchFamily="34" charset="-120"/>
-              </a:rPr>
-              <a:t> bước</a:t>
-            </a:r>
-            <a:r>
-              <a:rPr lang="en-US" sz="3000" dirty="0" spc="-2" kern="0">
-                <a:solidFill>
-                  <a:srgbClr val="14161C"/>
-                </a:solidFill>
-                <a:latin typeface="Be Vietnam Pro" pitchFamily="34" charset="0"/>
-                <a:ea typeface="Be Vietnam Pro" pitchFamily="34" charset="-122"/>
-                <a:cs typeface="Be Vietnam Pro" pitchFamily="34" charset="-120"/>
+                <a:latin typeface="Bricolage Grotesque ExtraBold" pitchFamily="34" charset="0"/>
+                <a:ea typeface="Bricolage Grotesque ExtraBold" pitchFamily="34" charset="-122"/>
+                <a:cs typeface="Bricolage Grotesque ExtraBold" pitchFamily="34" charset="-120"/>
               </a:rPr>
               <a:t> nào?</a:t>
             </a:r>
-            <a:endParaRPr lang="en-US" sz="3000" dirty="0"/>
+            <a:endParaRPr lang="en-US" sz="6900" dirty="0"/>
           </a:p>
         </p:txBody>
       </p:sp>

--- a/system-design-101/vi/lessons/sd-05-002/slides/sd-05-002.pptx
+++ b/system-design-101/vi/lessons/sd-05-002/slides/sd-05-002.pptx
@@ -1947,7 +1947,7 @@
               <a:buNone/>
             </a:pPr>
             <a:r>
-              <a:rPr lang="en-US" sz="3000" dirty="0" spc="-2" kern="0">
+              <a:rPr lang="en-US" sz="3000" dirty="0" spc="-31" kern="0">
                 <a:solidFill>
                   <a:srgbClr val="E4E1D8"/>
                 </a:solidFill>
@@ -1955,7 +1955,29 @@
                 <a:ea typeface="Be Vietnam Pro" pitchFamily="34" charset="-122"/>
                 <a:cs typeface="Be Vietnam Pro" pitchFamily="34" charset="-120"/>
               </a:rPr>
-              <a:t>Câu</a:t>
+              <a:t>Trình</a:t>
+            </a:r>
+            <a:r>
+              <a:rPr lang="en-US" sz="3000" dirty="0" spc="-22" kern="0">
+                <a:solidFill>
+                  <a:srgbClr val="E4E1D8"/>
+                </a:solidFill>
+                <a:latin typeface="Be Vietnam Pro" pitchFamily="34" charset="0"/>
+                <a:ea typeface="Be Vietnam Pro" pitchFamily="34" charset="-122"/>
+                <a:cs typeface="Be Vietnam Pro" pitchFamily="34" charset="-120"/>
+              </a:rPr>
+              <a:t> duyệt</a:t>
+            </a:r>
+            <a:r>
+              <a:rPr lang="en-US" sz="3000" dirty="0" spc="2" kern="0">
+                <a:solidFill>
+                  <a:srgbClr val="E4E1D8"/>
+                </a:solidFill>
+                <a:latin typeface="Be Vietnam Pro" pitchFamily="34" charset="0"/>
+                <a:ea typeface="Be Vietnam Pro" pitchFamily="34" charset="-122"/>
+                <a:cs typeface="Be Vietnam Pro" pitchFamily="34" charset="-120"/>
+              </a:rPr>
+              <a:t> làm</a:t>
             </a:r>
             <a:r>
               <a:rPr lang="en-US" sz="3000" dirty="0" spc="3" kern="0">
@@ -1966,10 +1988,10 @@
                 <a:ea typeface="Be Vietnam Pro" pitchFamily="34" charset="-122"/>
                 <a:cs typeface="Be Vietnam Pro" pitchFamily="34" charset="-120"/>
               </a:rPr>
-              <a:t> hỏi</a:t>
-            </a:r>
-            <a:r>
-              <a:rPr lang="en-US" sz="3000" dirty="0" spc="2" kern="0">
+              <a:t> gì</a:t>
+            </a:r>
+            <a:r>
+              <a:rPr lang="en-US" sz="3000" dirty="0" spc="9" kern="0">
                 <a:solidFill>
                   <a:srgbClr val="E4E1D8"/>
                 </a:solidFill>
@@ -1977,10 +1999,10 @@
                 <a:ea typeface="Be Vietnam Pro" pitchFamily="34" charset="-122"/>
                 <a:cs typeface="Be Vietnam Pro" pitchFamily="34" charset="-120"/>
               </a:rPr>
-              <a:t> phỏng</a:t>
-            </a:r>
-            <a:r>
-              <a:rPr lang="en-US" sz="3000" dirty="0" spc="-16" kern="0">
+              <a:t> trước</a:t>
+            </a:r>
+            <a:r>
+              <a:rPr lang="en-US" sz="3000" dirty="0" spc="3" kern="0">
                 <a:solidFill>
                   <a:srgbClr val="E4E1D8"/>
                 </a:solidFill>
@@ -1988,10 +2010,10 @@
                 <a:ea typeface="Be Vietnam Pro" pitchFamily="34" charset="-122"/>
                 <a:cs typeface="Be Vietnam Pro" pitchFamily="34" charset="-120"/>
               </a:rPr>
-              <a:t> vấn</a:t>
-            </a:r>
-            <a:r>
-              <a:rPr lang="en-US" sz="3000" dirty="0" spc="-1" kern="0">
+              <a:t> khi</a:t>
+            </a:r>
+            <a:r>
+              <a:rPr lang="en-US" sz="3000" dirty="0" spc="-20" kern="0">
                 <a:solidFill>
                   <a:srgbClr val="E4E1D8"/>
                 </a:solidFill>
@@ -1999,10 +2021,10 @@
                 <a:ea typeface="Be Vietnam Pro" pitchFamily="34" charset="-122"/>
                 <a:cs typeface="Be Vietnam Pro" pitchFamily="34" charset="-120"/>
               </a:rPr>
-              <a:t> quen</a:t>
-            </a:r>
-            <a:r>
-              <a:rPr lang="en-US" sz="3000" dirty="0" spc="-2" kern="0">
+              <a:t> trang</a:t>
+            </a:r>
+            <a:r>
+              <a:rPr lang="en-US" sz="3000" dirty="0" spc="0" kern="0">
                 <a:solidFill>
                   <a:srgbClr val="E4E1D8"/>
                 </a:solidFill>
@@ -2010,10 +2032,10 @@
                 <a:ea typeface="Be Vietnam Pro" pitchFamily="34" charset="-122"/>
                 <a:cs typeface="Be Vietnam Pro" pitchFamily="34" charset="-120"/>
               </a:rPr>
-              <a:t> thuộc:</a:t>
-            </a:r>
-            <a:r>
-              <a:rPr lang="en-US" sz="3000" dirty="0" spc="-43" kern="0">
+              <a:t> hiện</a:t>
+            </a:r>
+            <a:r>
+              <a:rPr lang="en-US" sz="3000" dirty="0" spc="-30" kern="0">
                 <a:solidFill>
                   <a:srgbClr val="E4E1D8"/>
                 </a:solidFill>
@@ -2021,40 +2043,7 @@
                 <a:ea typeface="Be Vietnam Pro" pitchFamily="34" charset="-122"/>
                 <a:cs typeface="Be Vietnam Pro" pitchFamily="34" charset="-120"/>
               </a:rPr>
-              <a:t> kể</a:t>
-            </a:r>
-            <a:r>
-              <a:rPr lang="en-US" sz="3000" dirty="0" spc="0" kern="0">
-                <a:solidFill>
-                  <a:srgbClr val="E4E1D8"/>
-                </a:solidFill>
-                <a:latin typeface="Be Vietnam Pro" pitchFamily="34" charset="0"/>
-                <a:ea typeface="Be Vietnam Pro" pitchFamily="34" charset="-122"/>
-                <a:cs typeface="Be Vietnam Pro" pitchFamily="34" charset="-120"/>
-              </a:rPr>
-              <a:t> đúng</a:t>
-            </a:r>
-            <a:r>
-              <a:rPr lang="en-US" sz="3000" dirty="0" spc="-1" kern="0">
-                <a:solidFill>
-                  <a:srgbClr val="E4E1D8"/>
-                </a:solidFill>
-                <a:latin typeface="Be Vietnam Pro" pitchFamily="34" charset="0"/>
-                <a:ea typeface="Be Vietnam Pro" pitchFamily="34" charset="-122"/>
-                <a:cs typeface="Be Vietnam Pro" pitchFamily="34" charset="-120"/>
-              </a:rPr>
-              <a:t> thứ</a:t>
-            </a:r>
-            <a:r>
-              <a:rPr lang="en-US" sz="3000" dirty="0" spc="-2" kern="0">
-                <a:solidFill>
-                  <a:srgbClr val="E4E1D8"/>
-                </a:solidFill>
-                <a:latin typeface="Be Vietnam Pro" pitchFamily="34" charset="0"/>
-                <a:ea typeface="Be Vietnam Pro" pitchFamily="34" charset="-122"/>
-                <a:cs typeface="Be Vietnam Pro" pitchFamily="34" charset="-120"/>
-              </a:rPr>
-              <a:t> tự.</a:t>
+              <a:t> ra?</a:t>
             </a:r>
             <a:endParaRPr lang="en-US" sz="3000" dirty="0"/>
           </a:p>
@@ -5295,10 +5284,10 @@
                 <a:ea typeface="Be Vietnam Pro" pitchFamily="34" charset="-122"/>
                 <a:cs typeface="Be Vietnam Pro" pitchFamily="34" charset="-120"/>
               </a:rPr>
-              <a:t>ByteByteGo,</a:t>
-            </a:r>
-            <a:r>
-              <a:rPr lang="en-US" sz="1800" dirty="0" spc="-1" kern="0">
+              <a:t>ByteByteGo</a:t>
+            </a:r>
+            <a:r>
+              <a:rPr lang="en-US" sz="1800" dirty="0" spc="1" kern="0">
                 <a:solidFill>
                   <a:srgbClr val="E4E1D8"/>
                 </a:solidFill>
@@ -5306,10 +5295,10 @@
                 <a:ea typeface="Be Vietnam Pro" pitchFamily="34" charset="-122"/>
                 <a:cs typeface="Be Vietnam Pro" pitchFamily="34" charset="-120"/>
               </a:rPr>
-              <a:t> bài</a:t>
-            </a:r>
-            <a:r>
-              <a:rPr lang="en-US" sz="1800" dirty="0" spc="-4" kern="0">
+              <a:t> · MDN</a:t>
+            </a:r>
+            <a:r>
+              <a:rPr lang="en-US" sz="1800" dirty="0" spc="-2" kern="0">
                 <a:solidFill>
                   <a:srgbClr val="E4E1D8"/>
                 </a:solidFill>
@@ -5317,10 +5306,10 @@
                 <a:ea typeface="Be Vietnam Pro" pitchFamily="34" charset="-122"/>
                 <a:cs typeface="Be Vietnam Pro" pitchFamily="34" charset="-120"/>
               </a:rPr>
-              <a:t> nguồn</a:t>
-            </a:r>
-            <a:r>
-              <a:rPr lang="en-US" sz="1800" dirty="0" spc="-10" kern="0">
+              <a:t> ·</a:t>
+            </a:r>
+            <a:r>
+              <a:rPr lang="en-US" sz="1800" dirty="0" spc="1" kern="0">
                 <a:solidFill>
                   <a:srgbClr val="E4E1D8"/>
                 </a:solidFill>
@@ -5328,7 +5317,18 @@
                 <a:ea typeface="Be Vietnam Pro" pitchFamily="34" charset="-122"/>
                 <a:cs typeface="Be Vietnam Pro" pitchFamily="34" charset="-120"/>
               </a:rPr>
-              <a:t> tại</a:t>
+              <a:t> BIND</a:t>
+            </a:r>
+            <a:r>
+              <a:rPr lang="en-US" sz="1800" dirty="0" spc="2" kern="0">
+                <a:solidFill>
+                  <a:srgbClr val="E4E1D8"/>
+                </a:solidFill>
+                <a:latin typeface="Be Vietnam Pro" pitchFamily="34" charset="0"/>
+                <a:ea typeface="Be Vietnam Pro" pitchFamily="34" charset="-122"/>
+                <a:cs typeface="Be Vietnam Pro" pitchFamily="34" charset="-120"/>
+              </a:rPr>
+              <a:t> 9.</a:t>
             </a:r>
             <a:r>
               <a:rPr lang="en-US" sz="1800" dirty="0" spc="0" kern="0">
@@ -5339,10 +5339,10 @@
                 <a:ea typeface="Be Vietnam Pro" pitchFamily="34" charset="-122"/>
                 <a:cs typeface="Be Vietnam Pro" pitchFamily="34" charset="-120"/>
               </a:rPr>
-              <a:t> commit cố</a:t>
-            </a:r>
-            <a:r>
-              <a:rPr lang="en-US" sz="1800" dirty="0" spc="14" kern="0">
+              <a:t> Đọc</a:t>
+            </a:r>
+            <a:r>
+              <a:rPr lang="en-US" sz="1800" dirty="0" spc="-15" kern="0">
                 <a:solidFill>
                   <a:srgbClr val="E4E1D8"/>
                 </a:solidFill>
@@ -5350,10 +5350,10 @@
                 <a:ea typeface="Be Vietnam Pro" pitchFamily="34" charset="-122"/>
                 <a:cs typeface="Be Vietnam Pro" pitchFamily="34" charset="-120"/>
               </a:rPr>
-              <a:t> định</a:t>
-            </a:r>
-            <a:r>
-              <a:rPr lang="en-US" sz="1800" dirty="0" spc="-2" kern="0">
+              <a:t> ngày</a:t>
+            </a:r>
+            <a:r>
+              <a:rPr lang="en-US" sz="1800" dirty="0" spc="1" kern="0">
                 <a:solidFill>
                   <a:srgbClr val="E4E1D8"/>
                 </a:solidFill>
@@ -5361,304 +5361,7 @@
                 <a:ea typeface="Be Vietnam Pro" pitchFamily="34" charset="-122"/>
                 <a:cs typeface="Be Vietnam Pro" pitchFamily="34" charset="-120"/>
               </a:rPr>
-              <a:t> ·</a:t>
-            </a:r>
-            <a:r>
-              <a:rPr lang="en-US" sz="1800" dirty="0" spc="1" kern="0">
-                <a:solidFill>
-                  <a:srgbClr val="E4E1D8"/>
-                </a:solidFill>
-                <a:latin typeface="Be Vietnam Pro" pitchFamily="34" charset="0"/>
-                <a:ea typeface="Be Vietnam Pro" pitchFamily="34" charset="-122"/>
-                <a:cs typeface="Be Vietnam Pro" pitchFamily="34" charset="-120"/>
-              </a:rPr>
-              <a:t> MDN: DNS,</a:t>
-            </a:r>
-            <a:r>
-              <a:rPr lang="en-US" sz="1800" dirty="0" spc="-34" kern="0">
-                <a:solidFill>
-                  <a:srgbClr val="E4E1D8"/>
-                </a:solidFill>
-                <a:latin typeface="Be Vietnam Pro" pitchFamily="34" charset="0"/>
-                <a:ea typeface="Be Vietnam Pro" pitchFamily="34" charset="-122"/>
-                <a:cs typeface="Be Vietnam Pro" pitchFamily="34" charset="-120"/>
-              </a:rPr>
-              <a:t> TCP</a:t>
-            </a:r>
-            <a:r>
-              <a:rPr lang="en-US" sz="1800" dirty="0" spc="-7" kern="0">
-                <a:solidFill>
-                  <a:srgbClr val="E4E1D8"/>
-                </a:solidFill>
-                <a:latin typeface="Be Vietnam Pro" pitchFamily="34" charset="0"/>
-                <a:ea typeface="Be Vietnam Pro" pitchFamily="34" charset="-122"/>
-                <a:cs typeface="Be Vietnam Pro" pitchFamily="34" charset="-120"/>
-              </a:rPr>
-              <a:t> handshake,</a:t>
-            </a:r>
-            <a:r>
-              <a:rPr lang="en-US" sz="1800" dirty="0" spc="-1" kern="0">
-                <a:solidFill>
-                  <a:srgbClr val="E4E1D8"/>
-                </a:solidFill>
-                <a:latin typeface="Be Vietnam Pro" pitchFamily="34" charset="0"/>
-                <a:ea typeface="Be Vietnam Pro" pitchFamily="34" charset="-122"/>
-                <a:cs typeface="Be Vietnam Pro" pitchFamily="34" charset="-120"/>
-              </a:rPr>
-              <a:t> TLS,</a:t>
-            </a:r>
-            <a:r>
-              <a:rPr lang="en-US" sz="1800" dirty="0" spc="-2" kern="0">
-                <a:solidFill>
-                  <a:srgbClr val="E4E1D8"/>
-                </a:solidFill>
-                <a:latin typeface="Be Vietnam Pro" pitchFamily="34" charset="0"/>
-                <a:ea typeface="Be Vietnam Pro" pitchFamily="34" charset="-122"/>
-                <a:cs typeface="Be Vietnam Pro" pitchFamily="34" charset="-120"/>
-              </a:rPr>
-              <a:t> Connection</a:t>
-            </a:r>
-            <a:r>
-              <a:rPr lang="en-US" sz="1800" dirty="0" spc="-7" kern="0">
-                <a:solidFill>
-                  <a:srgbClr val="E4E1D8"/>
-                </a:solidFill>
-                <a:latin typeface="Be Vietnam Pro" pitchFamily="34" charset="0"/>
-                <a:ea typeface="Be Vietnam Pro" pitchFamily="34" charset="-122"/>
-                <a:cs typeface="Be Vietnam Pro" pitchFamily="34" charset="-120"/>
-              </a:rPr>
-              <a:t> management</a:t>
-            </a:r>
-            <a:r>
-              <a:rPr lang="en-US" sz="1800" dirty="0" spc="-3" kern="0">
-                <a:solidFill>
-                  <a:srgbClr val="E4E1D8"/>
-                </a:solidFill>
-                <a:latin typeface="Be Vietnam Pro" pitchFamily="34" charset="0"/>
-                <a:ea typeface="Be Vietnam Pro" pitchFamily="34" charset="-122"/>
-                <a:cs typeface="Be Vietnam Pro" pitchFamily="34" charset="-120"/>
-              </a:rPr>
-              <a:t> in</a:t>
-            </a:r>
-            <a:r>
-              <a:rPr lang="en-US" sz="1800" dirty="0" spc="0" kern="0">
-                <a:solidFill>
-                  <a:srgbClr val="E4E1D8"/>
-                </a:solidFill>
-                <a:latin typeface="Be Vietnam Pro" pitchFamily="34" charset="0"/>
-                <a:ea typeface="Be Vietnam Pro" pitchFamily="34" charset="-122"/>
-                <a:cs typeface="Be Vietnam Pro" pitchFamily="34" charset="-120"/>
-              </a:rPr>
-              <a:t> HTTP/1.x,</a:t>
-            </a:r>
-            <a:r>
-              <a:rPr lang="en-US" sz="1800" dirty="0" spc="-1" kern="0">
-                <a:solidFill>
-                  <a:srgbClr val="E4E1D8"/>
-                </a:solidFill>
-                <a:latin typeface="Be Vietnam Pro" pitchFamily="34" charset="0"/>
-                <a:ea typeface="Be Vietnam Pro" pitchFamily="34" charset="-122"/>
-                <a:cs typeface="Be Vietnam Pro" pitchFamily="34" charset="-120"/>
-              </a:rPr>
-              <a:t> HTTP</a:t>
-            </a:r>
-            <a:r>
-              <a:rPr lang="en-US" sz="1800" dirty="0" spc="0" kern="0">
-                <a:solidFill>
-                  <a:srgbClr val="E4E1D8"/>
-                </a:solidFill>
-                <a:latin typeface="Be Vietnam Pro" pitchFamily="34" charset="0"/>
-                <a:ea typeface="Be Vietnam Pro" pitchFamily="34" charset="-122"/>
-                <a:cs typeface="Be Vietnam Pro" pitchFamily="34" charset="-120"/>
-              </a:rPr>
-              <a:t> caching,</a:t>
-            </a:r>
-            <a:r>
-              <a:rPr lang="en-US" sz="1800" dirty="0" spc="-6" kern="0">
-                <a:solidFill>
-                  <a:srgbClr val="E4E1D8"/>
-                </a:solidFill>
-                <a:latin typeface="Be Vietnam Pro" pitchFamily="34" charset="0"/>
-                <a:ea typeface="Be Vietnam Pro" pitchFamily="34" charset="-122"/>
-                <a:cs typeface="Be Vietnam Pro" pitchFamily="34" charset="-120"/>
-              </a:rPr>
-              <a:t> Strict-Transport-Security</a:t>
-            </a:r>
-            <a:r>
-              <a:rPr lang="en-US" sz="1800" dirty="0" spc="-1" kern="0">
-                <a:solidFill>
-                  <a:srgbClr val="E4E1D8"/>
-                </a:solidFill>
-                <a:latin typeface="Be Vietnam Pro" pitchFamily="34" charset="0"/>
-                <a:ea typeface="Be Vietnam Pro" pitchFamily="34" charset="-122"/>
-                <a:cs typeface="Be Vietnam Pro" pitchFamily="34" charset="-120"/>
-              </a:rPr>
-              <a:t> ·</a:t>
-            </a:r>
-            <a:r>
-              <a:rPr lang="en-US" sz="1800" dirty="0" spc="1" kern="0">
-                <a:solidFill>
-                  <a:srgbClr val="E4E1D8"/>
-                </a:solidFill>
-                <a:latin typeface="Be Vietnam Pro" pitchFamily="34" charset="0"/>
-                <a:ea typeface="Be Vietnam Pro" pitchFamily="34" charset="-122"/>
-                <a:cs typeface="Be Vietnam Pro" pitchFamily="34" charset="-120"/>
-              </a:rPr>
-              <a:t> BIND 9:</a:t>
-            </a:r>
-            <a:r>
-              <a:rPr lang="en-US" sz="1800" dirty="0" spc="-1" kern="0">
-                <a:solidFill>
-                  <a:srgbClr val="E4E1D8"/>
-                </a:solidFill>
-                <a:latin typeface="Be Vietnam Pro" pitchFamily="34" charset="0"/>
-                <a:ea typeface="Be Vietnam Pro" pitchFamily="34" charset="-122"/>
-                <a:cs typeface="Be Vietnam Pro" pitchFamily="34" charset="-120"/>
-              </a:rPr>
-              <a:t> giới</a:t>
-            </a:r>
-            <a:r>
-              <a:rPr lang="en-US" sz="1800" dirty="0" spc="-2" kern="0">
-                <a:solidFill>
-                  <a:srgbClr val="E4E1D8"/>
-                </a:solidFill>
-                <a:latin typeface="Be Vietnam Pro" pitchFamily="34" charset="0"/>
-                <a:ea typeface="Be Vietnam Pro" pitchFamily="34" charset="-122"/>
-                <a:cs typeface="Be Vietnam Pro" pitchFamily="34" charset="-120"/>
-              </a:rPr>
-              <a:t> thiệu</a:t>
-            </a:r>
-            <a:r>
-              <a:rPr lang="en-US" sz="1800" dirty="0" spc="3" kern="0">
-                <a:solidFill>
-                  <a:srgbClr val="E4E1D8"/>
-                </a:solidFill>
-                <a:latin typeface="Be Vietnam Pro" pitchFamily="34" charset="0"/>
-                <a:ea typeface="Be Vietnam Pro" pitchFamily="34" charset="-122"/>
-                <a:cs typeface="Be Vietnam Pro" pitchFamily="34" charset="-120"/>
-              </a:rPr>
-              <a:t> DNS</a:t>
-            </a:r>
-            <a:r>
-              <a:rPr lang="en-US" sz="1800" dirty="0" spc="-12" kern="0">
-                <a:solidFill>
-                  <a:srgbClr val="E4E1D8"/>
-                </a:solidFill>
-                <a:latin typeface="Be Vietnam Pro" pitchFamily="34" charset="0"/>
-                <a:ea typeface="Be Vietnam Pro" pitchFamily="34" charset="-122"/>
-                <a:cs typeface="Be Vietnam Pro" pitchFamily="34" charset="-120"/>
-              </a:rPr>
-              <a:t> và</a:t>
-            </a:r>
-            <a:r>
-              <a:rPr lang="en-US" sz="1800" dirty="0" spc="-1" kern="0">
-                <a:solidFill>
-                  <a:srgbClr val="E4E1D8"/>
-                </a:solidFill>
-                <a:latin typeface="Be Vietnam Pro" pitchFamily="34" charset="0"/>
-                <a:ea typeface="Be Vietnam Pro" pitchFamily="34" charset="-122"/>
-                <a:cs typeface="Be Vietnam Pro" pitchFamily="34" charset="-120"/>
-              </a:rPr>
-              <a:t> truy</a:t>
-            </a:r>
-            <a:r>
-              <a:rPr lang="en-US" sz="1800" dirty="0" spc="-8" kern="0">
-                <a:solidFill>
-                  <a:srgbClr val="E4E1D8"/>
-                </a:solidFill>
-                <a:latin typeface="Be Vietnam Pro" pitchFamily="34" charset="0"/>
-                <a:ea typeface="Be Vietnam Pro" pitchFamily="34" charset="-122"/>
-                <a:cs typeface="Be Vietnam Pro" pitchFamily="34" charset="-120"/>
-              </a:rPr>
-              <a:t> vấn.</a:t>
-            </a:r>
-            <a:r>
-              <a:rPr lang="en-US" sz="1800" dirty="0" spc="1" kern="0">
-                <a:solidFill>
-                  <a:srgbClr val="E4E1D8"/>
-                </a:solidFill>
-                <a:latin typeface="Be Vietnam Pro" pitchFamily="34" charset="0"/>
-                <a:ea typeface="Be Vietnam Pro" pitchFamily="34" charset="-122"/>
-                <a:cs typeface="Be Vietnam Pro" pitchFamily="34" charset="-120"/>
-              </a:rPr>
-              <a:t> Đọc</a:t>
-            </a:r>
-            <a:r>
-              <a:rPr lang="en-US" sz="1800" dirty="0" spc="-15" kern="0">
-                <a:solidFill>
-                  <a:srgbClr val="E4E1D8"/>
-                </a:solidFill>
-                <a:latin typeface="Be Vietnam Pro" pitchFamily="34" charset="0"/>
-                <a:ea typeface="Be Vietnam Pro" pitchFamily="34" charset="-122"/>
-                <a:cs typeface="Be Vietnam Pro" pitchFamily="34" charset="-120"/>
-              </a:rPr>
-              <a:t> ngày</a:t>
-            </a:r>
-            <a:r>
-              <a:rPr lang="en-US" sz="1800" dirty="0" spc="0" kern="0">
-                <a:solidFill>
-                  <a:srgbClr val="E4E1D8"/>
-                </a:solidFill>
-                <a:latin typeface="Be Vietnam Pro" pitchFamily="34" charset="0"/>
-                <a:ea typeface="Be Vietnam Pro" pitchFamily="34" charset="-122"/>
-                <a:cs typeface="Be Vietnam Pro" pitchFamily="34" charset="-120"/>
-              </a:rPr>
-              <a:t> 2026-10-13;</a:t>
-            </a:r>
-            <a:r>
-              <a:rPr lang="en-US" sz="1800" dirty="0" spc="-2" kern="0">
-                <a:solidFill>
-                  <a:srgbClr val="E4E1D8"/>
-                </a:solidFill>
-                <a:latin typeface="Be Vietnam Pro" pitchFamily="34" charset="0"/>
-                <a:ea typeface="Be Vietnam Pro" pitchFamily="34" charset="-122"/>
-                <a:cs typeface="Be Vietnam Pro" pitchFamily="34" charset="-120"/>
-              </a:rPr>
-              <a:t> hình</a:t>
-            </a:r>
-            <a:r>
-              <a:rPr lang="en-US" sz="1800" dirty="0" spc="-5" kern="0">
-                <a:solidFill>
-                  <a:srgbClr val="E4E1D8"/>
-                </a:solidFill>
-                <a:latin typeface="Be Vietnam Pro" pitchFamily="34" charset="0"/>
-                <a:ea typeface="Be Vietnam Pro" pitchFamily="34" charset="-122"/>
-                <a:cs typeface="Be Vietnam Pro" pitchFamily="34" charset="-120"/>
-              </a:rPr>
-              <a:t> thiết</a:t>
-            </a:r>
-            <a:r>
-              <a:rPr lang="en-US" sz="1800" dirty="0" spc="-28" kern="0">
-                <a:solidFill>
-                  <a:srgbClr val="E4E1D8"/>
-                </a:solidFill>
-                <a:latin typeface="Be Vietnam Pro" pitchFamily="34" charset="0"/>
-                <a:ea typeface="Be Vietnam Pro" pitchFamily="34" charset="-122"/>
-                <a:cs typeface="Be Vietnam Pro" pitchFamily="34" charset="-120"/>
-              </a:rPr>
-              <a:t> kế</a:t>
-            </a:r>
-            <a:r>
-              <a:rPr lang="en-US" sz="1800" dirty="0" spc="8" kern="0">
-                <a:solidFill>
-                  <a:srgbClr val="E4E1D8"/>
-                </a:solidFill>
-                <a:latin typeface="Be Vietnam Pro" pitchFamily="34" charset="0"/>
-                <a:ea typeface="Be Vietnam Pro" pitchFamily="34" charset="-122"/>
-                <a:cs typeface="Be Vietnam Pro" pitchFamily="34" charset="-120"/>
-              </a:rPr>
-              <a:t> độc</a:t>
-            </a:r>
-            <a:r>
-              <a:rPr lang="en-US" sz="1800" dirty="0" spc="0" kern="0">
-                <a:solidFill>
-                  <a:srgbClr val="E4E1D8"/>
-                </a:solidFill>
-                <a:latin typeface="Be Vietnam Pro" pitchFamily="34" charset="0"/>
-                <a:ea typeface="Be Vietnam Pro" pitchFamily="34" charset="-122"/>
-                <a:cs typeface="Be Vietnam Pro" pitchFamily="34" charset="-120"/>
-              </a:rPr>
-              <a:t> lập.</a:t>
+              <a:t> 2026-10-13.</a:t>
             </a:r>
             <a:endParaRPr lang="en-US" sz="1800" dirty="0"/>
           </a:p>
@@ -13265,6 +12968,83 @@
               <a:buNone/>
             </a:pPr>
             <a:r>
+              <a:rPr lang="en-US" sz="2550" b="1" dirty="0" spc="6" kern="0">
+                <a:solidFill>
+                  <a:srgbClr val="14161C"/>
+                </a:solidFill>
+                <a:latin typeface="Be Vietnam Pro" pitchFamily="34" charset="0"/>
+                <a:ea typeface="Be Vietnam Pro" pitchFamily="34" charset="-122"/>
+                <a:cs typeface="Be Vietnam Pro" pitchFamily="34" charset="-120"/>
+              </a:rPr>
+              <a:t>Cách</a:t>
+            </a:r>
+            <a:r>
+              <a:rPr lang="en-US" sz="2550" b="1" dirty="0" spc="5" kern="0">
+                <a:solidFill>
+                  <a:srgbClr val="14161C"/>
+                </a:solidFill>
+                <a:latin typeface="Be Vietnam Pro" pitchFamily="34" charset="0"/>
+                <a:ea typeface="Be Vietnam Pro" pitchFamily="34" charset="-122"/>
+                <a:cs typeface="Be Vietnam Pro" pitchFamily="34" charset="-120"/>
+              </a:rPr>
+              <a:t> trình</a:t>
+            </a:r>
+            <a:r>
+              <a:rPr lang="en-US" sz="2550" b="1" dirty="0" spc="-17" kern="0">
+                <a:solidFill>
+                  <a:srgbClr val="14161C"/>
+                </a:solidFill>
+                <a:latin typeface="Be Vietnam Pro" pitchFamily="34" charset="0"/>
+                <a:ea typeface="Be Vietnam Pro" pitchFamily="34" charset="-122"/>
+                <a:cs typeface="Be Vietnam Pro" pitchFamily="34" charset="-120"/>
+              </a:rPr>
+              <a:t> duyệt</a:t>
+            </a:r>
+            <a:r>
+              <a:rPr lang="en-US" sz="2550" b="1" dirty="0" spc="24" kern="0">
+                <a:solidFill>
+                  <a:srgbClr val="14161C"/>
+                </a:solidFill>
+                <a:latin typeface="Be Vietnam Pro" pitchFamily="34" charset="0"/>
+                <a:ea typeface="Be Vietnam Pro" pitchFamily="34" charset="-122"/>
+                <a:cs typeface="Be Vietnam Pro" pitchFamily="34" charset="-120"/>
+              </a:rPr>
+              <a:t> dựng</a:t>
+            </a:r>
+            <a:r>
+              <a:rPr lang="en-US" sz="2550" b="1" dirty="0" spc="-10" kern="0">
+                <a:solidFill>
+                  <a:srgbClr val="14161C"/>
+                </a:solidFill>
+                <a:latin typeface="Be Vietnam Pro" pitchFamily="34" charset="0"/>
+                <a:ea typeface="Be Vietnam Pro" pitchFamily="34" charset="-122"/>
+                <a:cs typeface="Be Vietnam Pro" pitchFamily="34" charset="-120"/>
+              </a:rPr>
+              <a:t> trang</a:t>
+            </a:r>
+            <a:r>
+              <a:rPr lang="en-US" sz="2550" b="1" dirty="0" spc="-3" kern="0">
+                <a:solidFill>
+                  <a:srgbClr val="14161C"/>
+                </a:solidFill>
+                <a:latin typeface="Be Vietnam Pro" pitchFamily="34" charset="0"/>
+                <a:ea typeface="Be Vietnam Pro" pitchFamily="34" charset="-122"/>
+                <a:cs typeface="Be Vietnam Pro" pitchFamily="34" charset="-120"/>
+              </a:rPr>
+              <a:t> có</a:t>
+            </a:r>
+            <a:r>
+              <a:rPr lang="en-US" sz="2550" b="1" dirty="0" spc="1" kern="0">
+                <a:solidFill>
+                  <a:srgbClr val="14161C"/>
+                </a:solidFill>
+                <a:latin typeface="Be Vietnam Pro" pitchFamily="34" charset="0"/>
+                <a:ea typeface="Be Vietnam Pro" pitchFamily="34" charset="-122"/>
+                <a:cs typeface="Be Vietnam Pro" pitchFamily="34" charset="-120"/>
+              </a:rPr>
+              <a:t> bài</a:t>
+            </a:r>
+            <a:r>
               <a:rPr lang="en-US" sz="2550" b="1" dirty="0" spc="2" kern="0">
                 <a:solidFill>
                   <a:srgbClr val="14161C"/>
@@ -13273,117 +13053,7 @@
                 <a:ea typeface="Be Vietnam Pro" pitchFamily="34" charset="-122"/>
                 <a:cs typeface="Be Vietnam Pro" pitchFamily="34" charset="-120"/>
               </a:rPr>
-              <a:t>Chi</a:t>
-            </a:r>
-            <a:r>
-              <a:rPr lang="en-US" sz="2550" b="1" dirty="0" spc="-2" kern="0">
-                <a:solidFill>
-                  <a:srgbClr val="14161C"/>
-                </a:solidFill>
-                <a:latin typeface="Be Vietnam Pro" pitchFamily="34" charset="0"/>
-                <a:ea typeface="Be Vietnam Pro" pitchFamily="34" charset="-122"/>
-                <a:cs typeface="Be Vietnam Pro" pitchFamily="34" charset="-120"/>
-              </a:rPr>
-              <a:t> tiết</a:t>
-            </a:r>
-            <a:r>
-              <a:rPr lang="en-US" sz="2550" b="1" dirty="0" spc="-4" kern="0">
-                <a:solidFill>
-                  <a:srgbClr val="14161C"/>
-                </a:solidFill>
-                <a:latin typeface="Be Vietnam Pro" pitchFamily="34" charset="0"/>
-                <a:ea typeface="Be Vietnam Pro" pitchFamily="34" charset="-122"/>
-                <a:cs typeface="Be Vietnam Pro" pitchFamily="34" charset="-120"/>
-              </a:rPr>
-              <a:t> có</a:t>
-            </a:r>
-            <a:r>
-              <a:rPr lang="en-US" sz="2550" b="1" dirty="0" spc="2" kern="0">
-                <a:solidFill>
-                  <a:srgbClr val="14161C"/>
-                </a:solidFill>
-                <a:latin typeface="Be Vietnam Pro" pitchFamily="34" charset="0"/>
-                <a:ea typeface="Be Vietnam Pro" pitchFamily="34" charset="-122"/>
-                <a:cs typeface="Be Vietnam Pro" pitchFamily="34" charset="-120"/>
-              </a:rPr>
-              <a:t> bài</a:t>
-            </a:r>
-            <a:r>
-              <a:rPr lang="en-US" sz="2550" b="1" dirty="0" spc="1" kern="0">
-                <a:solidFill>
-                  <a:srgbClr val="14161C"/>
-                </a:solidFill>
-                <a:latin typeface="Be Vietnam Pro" pitchFamily="34" charset="0"/>
-                <a:ea typeface="Be Vietnam Pro" pitchFamily="34" charset="-122"/>
-                <a:cs typeface="Be Vietnam Pro" pitchFamily="34" charset="-120"/>
-              </a:rPr>
-              <a:t> riêng</a:t>
-            </a:r>
-            <a:r>
-              <a:rPr lang="en-US" sz="2550" b="1" dirty="0" spc="-21" kern="0">
-                <a:solidFill>
-                  <a:srgbClr val="14161C"/>
-                </a:solidFill>
-                <a:latin typeface="Be Vietnam Pro" pitchFamily="34" charset="0"/>
-                <a:ea typeface="Be Vietnam Pro" pitchFamily="34" charset="-122"/>
-                <a:cs typeface="Be Vietnam Pro" pitchFamily="34" charset="-120"/>
-              </a:rPr>
-              <a:t> về</a:t>
-            </a:r>
-            <a:r>
-              <a:rPr lang="en-US" sz="2550" b="1" dirty="0" spc="2" kern="0">
-                <a:solidFill>
-                  <a:srgbClr val="14161C"/>
-                </a:solidFill>
-                <a:latin typeface="Be Vietnam Pro" pitchFamily="34" charset="0"/>
-                <a:ea typeface="Be Vietnam Pro" pitchFamily="34" charset="-122"/>
-                <a:cs typeface="Be Vietnam Pro" pitchFamily="34" charset="-120"/>
-              </a:rPr>
-              <a:t> cách</a:t>
-            </a:r>
-            <a:r>
-              <a:rPr lang="en-US" sz="2550" b="1" dirty="0" spc="5" kern="0">
-                <a:solidFill>
-                  <a:srgbClr val="14161C"/>
-                </a:solidFill>
-                <a:latin typeface="Be Vietnam Pro" pitchFamily="34" charset="0"/>
-                <a:ea typeface="Be Vietnam Pro" pitchFamily="34" charset="-122"/>
-                <a:cs typeface="Be Vietnam Pro" pitchFamily="34" charset="-120"/>
-              </a:rPr>
-              <a:t> trình</a:t>
-            </a:r>
-            <a:r>
-              <a:rPr lang="en-US" sz="2550" b="1" dirty="0" spc="-17" kern="0">
-                <a:solidFill>
-                  <a:srgbClr val="14161C"/>
-                </a:solidFill>
-                <a:latin typeface="Be Vietnam Pro" pitchFamily="34" charset="0"/>
-                <a:ea typeface="Be Vietnam Pro" pitchFamily="34" charset="-122"/>
-                <a:cs typeface="Be Vietnam Pro" pitchFamily="34" charset="-120"/>
-              </a:rPr>
-              <a:t> duyệt</a:t>
-            </a:r>
-            <a:r>
-              <a:rPr lang="en-US" sz="2550" b="1" dirty="0" spc="24" kern="0">
-                <a:solidFill>
-                  <a:srgbClr val="14161C"/>
-                </a:solidFill>
-                <a:latin typeface="Be Vietnam Pro" pitchFamily="34" charset="0"/>
-                <a:ea typeface="Be Vietnam Pro" pitchFamily="34" charset="-122"/>
-                <a:cs typeface="Be Vietnam Pro" pitchFamily="34" charset="-120"/>
-              </a:rPr>
-              <a:t> dựng</a:t>
-            </a:r>
-            <a:r>
-              <a:rPr lang="en-US" sz="2550" b="1" dirty="0" spc="-10" kern="0">
-                <a:solidFill>
-                  <a:srgbClr val="14161C"/>
-                </a:solidFill>
-                <a:latin typeface="Be Vietnam Pro" pitchFamily="34" charset="0"/>
-                <a:ea typeface="Be Vietnam Pro" pitchFamily="34" charset="-122"/>
-                <a:cs typeface="Be Vietnam Pro" pitchFamily="34" charset="-120"/>
-              </a:rPr>
-              <a:t> trang</a:t>
+              <a:t> riêng.</a:t>
             </a:r>
             <a:endParaRPr lang="en-US" sz="2550" dirty="0"/>
           </a:p>
